--- a/demo/presentation.pptx
+++ b/demo/presentation.pptx
@@ -3226,7 +3226,7 @@
                 </a:solidFill>
                 <a:latin typeface="Calibri"/>
               </a:rPr>
-              <a:t>2024eb02494</a:t>
+              <a:t>24bcs10407</a:t>
             </a:r>
           </a:p>
         </p:txBody>
